--- a/中越詩歌/更新我心意_Luyện lòng con.pptx
+++ b/中越詩歌/更新我心意_Luyện lòng con.pptx
@@ -154,7 +154,7 @@
           <a:lstStyle/>
           <a:p>
             <a:r>
-              <a:rPr lang="en-US" altLang="zh-TW" smtClean="0"/>
+              <a:rPr lang="en-US" altLang="zh-TW"/>
               <a:t>Click to edit Master title style</a:t>
             </a:r>
             <a:endParaRPr lang="zh-TW" altLang="en-US"/>
@@ -273,7 +273,7 @@
           </a:lstStyle>
           <a:p>
             <a:r>
-              <a:rPr lang="en-US" altLang="zh-TW" smtClean="0"/>
+              <a:rPr lang="en-US" altLang="zh-TW"/>
               <a:t>Click to edit Master subtitle style</a:t>
             </a:r>
             <a:endParaRPr lang="zh-TW" altLang="en-US"/>
@@ -297,7 +297,7 @@
           <a:p>
             <a:fld id="{4708DAAA-A60A-4649-A77A-7F12CC5C96A6}" type="datetimeFigureOut">
               <a:rPr lang="vi-VN" smtClean="0"/>
-              <a:t>13/02/2026</a:t>
+              <a:t>16/02/2026</a:t>
             </a:fld>
             <a:endParaRPr lang="vi-VN"/>
           </a:p>
@@ -391,7 +391,7 @@
           <a:lstStyle/>
           <a:p>
             <a:r>
-              <a:rPr lang="en-US" altLang="zh-TW" smtClean="0"/>
+              <a:rPr lang="en-US" altLang="zh-TW"/>
               <a:t>Click to edit Master title style</a:t>
             </a:r>
             <a:endParaRPr lang="zh-TW" altLang="en-US"/>
@@ -415,35 +415,35 @@
           <a:p>
             <a:pPr lvl="0"/>
             <a:r>
-              <a:rPr lang="en-US" altLang="zh-TW" smtClean="0"/>
+              <a:rPr lang="en-US" altLang="zh-TW"/>
               <a:t>Edit Master text styles</a:t>
             </a:r>
           </a:p>
           <a:p>
             <a:pPr lvl="1"/>
             <a:r>
-              <a:rPr lang="en-US" altLang="zh-TW" smtClean="0"/>
+              <a:rPr lang="en-US" altLang="zh-TW"/>
               <a:t>Second level</a:t>
             </a:r>
           </a:p>
           <a:p>
             <a:pPr lvl="2"/>
             <a:r>
-              <a:rPr lang="en-US" altLang="zh-TW" smtClean="0"/>
+              <a:rPr lang="en-US" altLang="zh-TW"/>
               <a:t>Third level</a:t>
             </a:r>
           </a:p>
           <a:p>
             <a:pPr lvl="3"/>
             <a:r>
-              <a:rPr lang="en-US" altLang="zh-TW" smtClean="0"/>
+              <a:rPr lang="en-US" altLang="zh-TW"/>
               <a:t>Fourth level</a:t>
             </a:r>
           </a:p>
           <a:p>
             <a:pPr lvl="4"/>
             <a:r>
-              <a:rPr lang="en-US" altLang="zh-TW" smtClean="0"/>
+              <a:rPr lang="en-US" altLang="zh-TW"/>
               <a:t>Fifth level</a:t>
             </a:r>
             <a:endParaRPr lang="zh-TW" altLang="en-US"/>
@@ -467,7 +467,7 @@
           <a:p>
             <a:fld id="{4708DAAA-A60A-4649-A77A-7F12CC5C96A6}" type="datetimeFigureOut">
               <a:rPr lang="vi-VN" smtClean="0"/>
-              <a:t>13/02/2026</a:t>
+              <a:t>16/02/2026</a:t>
             </a:fld>
             <a:endParaRPr lang="vi-VN"/>
           </a:p>
@@ -566,7 +566,7 @@
           <a:lstStyle/>
           <a:p>
             <a:r>
-              <a:rPr lang="en-US" altLang="zh-TW" smtClean="0"/>
+              <a:rPr lang="en-US" altLang="zh-TW"/>
               <a:t>Click to edit Master title style</a:t>
             </a:r>
             <a:endParaRPr lang="zh-TW" altLang="en-US"/>
@@ -595,35 +595,35 @@
           <a:p>
             <a:pPr lvl="0"/>
             <a:r>
-              <a:rPr lang="en-US" altLang="zh-TW" smtClean="0"/>
+              <a:rPr lang="en-US" altLang="zh-TW"/>
               <a:t>Edit Master text styles</a:t>
             </a:r>
           </a:p>
           <a:p>
             <a:pPr lvl="1"/>
             <a:r>
-              <a:rPr lang="en-US" altLang="zh-TW" smtClean="0"/>
+              <a:rPr lang="en-US" altLang="zh-TW"/>
               <a:t>Second level</a:t>
             </a:r>
           </a:p>
           <a:p>
             <a:pPr lvl="2"/>
             <a:r>
-              <a:rPr lang="en-US" altLang="zh-TW" smtClean="0"/>
+              <a:rPr lang="en-US" altLang="zh-TW"/>
               <a:t>Third level</a:t>
             </a:r>
           </a:p>
           <a:p>
             <a:pPr lvl="3"/>
             <a:r>
-              <a:rPr lang="en-US" altLang="zh-TW" smtClean="0"/>
+              <a:rPr lang="en-US" altLang="zh-TW"/>
               <a:t>Fourth level</a:t>
             </a:r>
           </a:p>
           <a:p>
             <a:pPr lvl="4"/>
             <a:r>
-              <a:rPr lang="en-US" altLang="zh-TW" smtClean="0"/>
+              <a:rPr lang="en-US" altLang="zh-TW"/>
               <a:t>Fifth level</a:t>
             </a:r>
             <a:endParaRPr lang="zh-TW" altLang="en-US"/>
@@ -647,7 +647,7 @@
           <a:p>
             <a:fld id="{4708DAAA-A60A-4649-A77A-7F12CC5C96A6}" type="datetimeFigureOut">
               <a:rPr lang="vi-VN" smtClean="0"/>
-              <a:t>13/02/2026</a:t>
+              <a:t>16/02/2026</a:t>
             </a:fld>
             <a:endParaRPr lang="vi-VN"/>
           </a:p>
@@ -741,7 +741,7 @@
           <a:lstStyle/>
           <a:p>
             <a:r>
-              <a:rPr lang="en-US" altLang="zh-TW" smtClean="0"/>
+              <a:rPr lang="en-US" altLang="zh-TW"/>
               <a:t>Click to edit Master title style</a:t>
             </a:r>
             <a:endParaRPr lang="zh-TW" altLang="en-US"/>
@@ -765,35 +765,35 @@
           <a:p>
             <a:pPr lvl="0"/>
             <a:r>
-              <a:rPr lang="en-US" altLang="zh-TW" smtClean="0"/>
+              <a:rPr lang="en-US" altLang="zh-TW"/>
               <a:t>Edit Master text styles</a:t>
             </a:r>
           </a:p>
           <a:p>
             <a:pPr lvl="1"/>
             <a:r>
-              <a:rPr lang="en-US" altLang="zh-TW" smtClean="0"/>
+              <a:rPr lang="en-US" altLang="zh-TW"/>
               <a:t>Second level</a:t>
             </a:r>
           </a:p>
           <a:p>
             <a:pPr lvl="2"/>
             <a:r>
-              <a:rPr lang="en-US" altLang="zh-TW" smtClean="0"/>
+              <a:rPr lang="en-US" altLang="zh-TW"/>
               <a:t>Third level</a:t>
             </a:r>
           </a:p>
           <a:p>
             <a:pPr lvl="3"/>
             <a:r>
-              <a:rPr lang="en-US" altLang="zh-TW" smtClean="0"/>
+              <a:rPr lang="en-US" altLang="zh-TW"/>
               <a:t>Fourth level</a:t>
             </a:r>
           </a:p>
           <a:p>
             <a:pPr lvl="4"/>
             <a:r>
-              <a:rPr lang="en-US" altLang="zh-TW" smtClean="0"/>
+              <a:rPr lang="en-US" altLang="zh-TW"/>
               <a:t>Fifth level</a:t>
             </a:r>
             <a:endParaRPr lang="zh-TW" altLang="en-US"/>
@@ -817,7 +817,7 @@
           <a:p>
             <a:fld id="{4708DAAA-A60A-4649-A77A-7F12CC5C96A6}" type="datetimeFigureOut">
               <a:rPr lang="vi-VN" smtClean="0"/>
-              <a:t>13/02/2026</a:t>
+              <a:t>16/02/2026</a:t>
             </a:fld>
             <a:endParaRPr lang="vi-VN"/>
           </a:p>
@@ -920,7 +920,7 @@
           </a:lstStyle>
           <a:p>
             <a:r>
-              <a:rPr lang="en-US" altLang="zh-TW" smtClean="0"/>
+              <a:rPr lang="en-US" altLang="zh-TW"/>
               <a:t>Click to edit Master title style</a:t>
             </a:r>
             <a:endParaRPr lang="zh-TW" altLang="en-US"/>
@@ -1040,7 +1040,7 @@
           <a:p>
             <a:pPr lvl="0"/>
             <a:r>
-              <a:rPr lang="en-US" altLang="zh-TW" smtClean="0"/>
+              <a:rPr lang="en-US" altLang="zh-TW"/>
               <a:t>Edit Master text styles</a:t>
             </a:r>
           </a:p>
@@ -1063,7 +1063,7 @@
           <a:p>
             <a:fld id="{4708DAAA-A60A-4649-A77A-7F12CC5C96A6}" type="datetimeFigureOut">
               <a:rPr lang="vi-VN" smtClean="0"/>
-              <a:t>13/02/2026</a:t>
+              <a:t>16/02/2026</a:t>
             </a:fld>
             <a:endParaRPr lang="vi-VN"/>
           </a:p>
@@ -1157,7 +1157,7 @@
           <a:lstStyle/>
           <a:p>
             <a:r>
-              <a:rPr lang="en-US" altLang="zh-TW" smtClean="0"/>
+              <a:rPr lang="en-US" altLang="zh-TW"/>
               <a:t>Click to edit Master title style</a:t>
             </a:r>
             <a:endParaRPr lang="zh-TW" altLang="en-US"/>
@@ -1214,35 +1214,35 @@
           <a:p>
             <a:pPr lvl="0"/>
             <a:r>
-              <a:rPr lang="en-US" altLang="zh-TW" smtClean="0"/>
+              <a:rPr lang="en-US" altLang="zh-TW"/>
               <a:t>Edit Master text styles</a:t>
             </a:r>
           </a:p>
           <a:p>
             <a:pPr lvl="1"/>
             <a:r>
-              <a:rPr lang="en-US" altLang="zh-TW" smtClean="0"/>
+              <a:rPr lang="en-US" altLang="zh-TW"/>
               <a:t>Second level</a:t>
             </a:r>
           </a:p>
           <a:p>
             <a:pPr lvl="2"/>
             <a:r>
-              <a:rPr lang="en-US" altLang="zh-TW" smtClean="0"/>
+              <a:rPr lang="en-US" altLang="zh-TW"/>
               <a:t>Third level</a:t>
             </a:r>
           </a:p>
           <a:p>
             <a:pPr lvl="3"/>
             <a:r>
-              <a:rPr lang="en-US" altLang="zh-TW" smtClean="0"/>
+              <a:rPr lang="en-US" altLang="zh-TW"/>
               <a:t>Fourth level</a:t>
             </a:r>
           </a:p>
           <a:p>
             <a:pPr lvl="4"/>
             <a:r>
-              <a:rPr lang="en-US" altLang="zh-TW" smtClean="0"/>
+              <a:rPr lang="en-US" altLang="zh-TW"/>
               <a:t>Fifth level</a:t>
             </a:r>
             <a:endParaRPr lang="zh-TW" altLang="en-US"/>
@@ -1299,35 +1299,35 @@
           <a:p>
             <a:pPr lvl="0"/>
             <a:r>
-              <a:rPr lang="en-US" altLang="zh-TW" smtClean="0"/>
+              <a:rPr lang="en-US" altLang="zh-TW"/>
               <a:t>Edit Master text styles</a:t>
             </a:r>
           </a:p>
           <a:p>
             <a:pPr lvl="1"/>
             <a:r>
-              <a:rPr lang="en-US" altLang="zh-TW" smtClean="0"/>
+              <a:rPr lang="en-US" altLang="zh-TW"/>
               <a:t>Second level</a:t>
             </a:r>
           </a:p>
           <a:p>
             <a:pPr lvl="2"/>
             <a:r>
-              <a:rPr lang="en-US" altLang="zh-TW" smtClean="0"/>
+              <a:rPr lang="en-US" altLang="zh-TW"/>
               <a:t>Third level</a:t>
             </a:r>
           </a:p>
           <a:p>
             <a:pPr lvl="3"/>
             <a:r>
-              <a:rPr lang="en-US" altLang="zh-TW" smtClean="0"/>
+              <a:rPr lang="en-US" altLang="zh-TW"/>
               <a:t>Fourth level</a:t>
             </a:r>
           </a:p>
           <a:p>
             <a:pPr lvl="4"/>
             <a:r>
-              <a:rPr lang="en-US" altLang="zh-TW" smtClean="0"/>
+              <a:rPr lang="en-US" altLang="zh-TW"/>
               <a:t>Fifth level</a:t>
             </a:r>
             <a:endParaRPr lang="zh-TW" altLang="en-US"/>
@@ -1351,7 +1351,7 @@
           <a:p>
             <a:fld id="{4708DAAA-A60A-4649-A77A-7F12CC5C96A6}" type="datetimeFigureOut">
               <a:rPr lang="vi-VN" smtClean="0"/>
-              <a:t>13/02/2026</a:t>
+              <a:t>16/02/2026</a:t>
             </a:fld>
             <a:endParaRPr lang="vi-VN"/>
           </a:p>
@@ -1449,7 +1449,7 @@
           </a:lstStyle>
           <a:p>
             <a:r>
-              <a:rPr lang="en-US" altLang="zh-TW" smtClean="0"/>
+              <a:rPr lang="en-US" altLang="zh-TW"/>
               <a:t>Click to edit Master title style</a:t>
             </a:r>
             <a:endParaRPr lang="zh-TW" altLang="en-US"/>
@@ -1515,7 +1515,7 @@
           <a:p>
             <a:pPr lvl="0"/>
             <a:r>
-              <a:rPr lang="en-US" altLang="zh-TW" smtClean="0"/>
+              <a:rPr lang="en-US" altLang="zh-TW"/>
               <a:t>Edit Master text styles</a:t>
             </a:r>
           </a:p>
@@ -1571,35 +1571,35 @@
           <a:p>
             <a:pPr lvl="0"/>
             <a:r>
-              <a:rPr lang="en-US" altLang="zh-TW" smtClean="0"/>
+              <a:rPr lang="en-US" altLang="zh-TW"/>
               <a:t>Edit Master text styles</a:t>
             </a:r>
           </a:p>
           <a:p>
             <a:pPr lvl="1"/>
             <a:r>
-              <a:rPr lang="en-US" altLang="zh-TW" smtClean="0"/>
+              <a:rPr lang="en-US" altLang="zh-TW"/>
               <a:t>Second level</a:t>
             </a:r>
           </a:p>
           <a:p>
             <a:pPr lvl="2"/>
             <a:r>
-              <a:rPr lang="en-US" altLang="zh-TW" smtClean="0"/>
+              <a:rPr lang="en-US" altLang="zh-TW"/>
               <a:t>Third level</a:t>
             </a:r>
           </a:p>
           <a:p>
             <a:pPr lvl="3"/>
             <a:r>
-              <a:rPr lang="en-US" altLang="zh-TW" smtClean="0"/>
+              <a:rPr lang="en-US" altLang="zh-TW"/>
               <a:t>Fourth level</a:t>
             </a:r>
           </a:p>
           <a:p>
             <a:pPr lvl="4"/>
             <a:r>
-              <a:rPr lang="en-US" altLang="zh-TW" smtClean="0"/>
+              <a:rPr lang="en-US" altLang="zh-TW"/>
               <a:t>Fifth level</a:t>
             </a:r>
             <a:endParaRPr lang="zh-TW" altLang="en-US"/>
@@ -1665,7 +1665,7 @@
           <a:p>
             <a:pPr lvl="0"/>
             <a:r>
-              <a:rPr lang="en-US" altLang="zh-TW" smtClean="0"/>
+              <a:rPr lang="en-US" altLang="zh-TW"/>
               <a:t>Edit Master text styles</a:t>
             </a:r>
           </a:p>
@@ -1721,35 +1721,35 @@
           <a:p>
             <a:pPr lvl="0"/>
             <a:r>
-              <a:rPr lang="en-US" altLang="zh-TW" smtClean="0"/>
+              <a:rPr lang="en-US" altLang="zh-TW"/>
               <a:t>Edit Master text styles</a:t>
             </a:r>
           </a:p>
           <a:p>
             <a:pPr lvl="1"/>
             <a:r>
-              <a:rPr lang="en-US" altLang="zh-TW" smtClean="0"/>
+              <a:rPr lang="en-US" altLang="zh-TW"/>
               <a:t>Second level</a:t>
             </a:r>
           </a:p>
           <a:p>
             <a:pPr lvl="2"/>
             <a:r>
-              <a:rPr lang="en-US" altLang="zh-TW" smtClean="0"/>
+              <a:rPr lang="en-US" altLang="zh-TW"/>
               <a:t>Third level</a:t>
             </a:r>
           </a:p>
           <a:p>
             <a:pPr lvl="3"/>
             <a:r>
-              <a:rPr lang="en-US" altLang="zh-TW" smtClean="0"/>
+              <a:rPr lang="en-US" altLang="zh-TW"/>
               <a:t>Fourth level</a:t>
             </a:r>
           </a:p>
           <a:p>
             <a:pPr lvl="4"/>
             <a:r>
-              <a:rPr lang="en-US" altLang="zh-TW" smtClean="0"/>
+              <a:rPr lang="en-US" altLang="zh-TW"/>
               <a:t>Fifth level</a:t>
             </a:r>
             <a:endParaRPr lang="zh-TW" altLang="en-US"/>
@@ -1773,7 +1773,7 @@
           <a:p>
             <a:fld id="{4708DAAA-A60A-4649-A77A-7F12CC5C96A6}" type="datetimeFigureOut">
               <a:rPr lang="vi-VN" smtClean="0"/>
-              <a:t>13/02/2026</a:t>
+              <a:t>16/02/2026</a:t>
             </a:fld>
             <a:endParaRPr lang="vi-VN"/>
           </a:p>
@@ -1867,7 +1867,7 @@
           <a:lstStyle/>
           <a:p>
             <a:r>
-              <a:rPr lang="en-US" altLang="zh-TW" smtClean="0"/>
+              <a:rPr lang="en-US" altLang="zh-TW"/>
               <a:t>Click to edit Master title style</a:t>
             </a:r>
             <a:endParaRPr lang="zh-TW" altLang="en-US"/>
@@ -1891,7 +1891,7 @@
           <a:p>
             <a:fld id="{4708DAAA-A60A-4649-A77A-7F12CC5C96A6}" type="datetimeFigureOut">
               <a:rPr lang="vi-VN" smtClean="0"/>
-              <a:t>13/02/2026</a:t>
+              <a:t>16/02/2026</a:t>
             </a:fld>
             <a:endParaRPr lang="vi-VN"/>
           </a:p>
@@ -1986,7 +1986,7 @@
           <a:p>
             <a:fld id="{4708DAAA-A60A-4649-A77A-7F12CC5C96A6}" type="datetimeFigureOut">
               <a:rPr lang="vi-VN" smtClean="0"/>
-              <a:t>13/02/2026</a:t>
+              <a:t>16/02/2026</a:t>
             </a:fld>
             <a:endParaRPr lang="vi-VN"/>
           </a:p>
@@ -2089,7 +2089,7 @@
           </a:lstStyle>
           <a:p>
             <a:r>
-              <a:rPr lang="en-US" altLang="zh-TW" smtClean="0"/>
+              <a:rPr lang="en-US" altLang="zh-TW"/>
               <a:t>Click to edit Master title style</a:t>
             </a:r>
             <a:endParaRPr lang="zh-TW" altLang="en-US"/>
@@ -2146,35 +2146,35 @@
           <a:p>
             <a:pPr lvl="0"/>
             <a:r>
-              <a:rPr lang="en-US" altLang="zh-TW" smtClean="0"/>
+              <a:rPr lang="en-US" altLang="zh-TW"/>
               <a:t>Edit Master text styles</a:t>
             </a:r>
           </a:p>
           <a:p>
             <a:pPr lvl="1"/>
             <a:r>
-              <a:rPr lang="en-US" altLang="zh-TW" smtClean="0"/>
+              <a:rPr lang="en-US" altLang="zh-TW"/>
               <a:t>Second level</a:t>
             </a:r>
           </a:p>
           <a:p>
             <a:pPr lvl="2"/>
             <a:r>
-              <a:rPr lang="en-US" altLang="zh-TW" smtClean="0"/>
+              <a:rPr lang="en-US" altLang="zh-TW"/>
               <a:t>Third level</a:t>
             </a:r>
           </a:p>
           <a:p>
             <a:pPr lvl="3"/>
             <a:r>
-              <a:rPr lang="en-US" altLang="zh-TW" smtClean="0"/>
+              <a:rPr lang="en-US" altLang="zh-TW"/>
               <a:t>Fourth level</a:t>
             </a:r>
           </a:p>
           <a:p>
             <a:pPr lvl="4"/>
             <a:r>
-              <a:rPr lang="en-US" altLang="zh-TW" smtClean="0"/>
+              <a:rPr lang="en-US" altLang="zh-TW"/>
               <a:t>Fifth level</a:t>
             </a:r>
             <a:endParaRPr lang="zh-TW" altLang="en-US"/>
@@ -2240,7 +2240,7 @@
           <a:p>
             <a:pPr lvl="0"/>
             <a:r>
-              <a:rPr lang="en-US" altLang="zh-TW" smtClean="0"/>
+              <a:rPr lang="en-US" altLang="zh-TW"/>
               <a:t>Edit Master text styles</a:t>
             </a:r>
           </a:p>
@@ -2263,7 +2263,7 @@
           <a:p>
             <a:fld id="{4708DAAA-A60A-4649-A77A-7F12CC5C96A6}" type="datetimeFigureOut">
               <a:rPr lang="vi-VN" smtClean="0"/>
-              <a:t>13/02/2026</a:t>
+              <a:t>16/02/2026</a:t>
             </a:fld>
             <a:endParaRPr lang="vi-VN"/>
           </a:p>
@@ -2366,7 +2366,7 @@
           </a:lstStyle>
           <a:p>
             <a:r>
-              <a:rPr lang="en-US" altLang="zh-TW" smtClean="0"/>
+              <a:rPr lang="en-US" altLang="zh-TW"/>
               <a:t>Click to edit Master title style</a:t>
             </a:r>
             <a:endParaRPr lang="zh-TW" altLang="en-US"/>
@@ -2431,7 +2431,7 @@
           </a:lstStyle>
           <a:p>
             <a:r>
-              <a:rPr lang="en-US" altLang="zh-TW" smtClean="0"/>
+              <a:rPr lang="en-US" altLang="zh-TW"/>
               <a:t>Click icon to add picture</a:t>
             </a:r>
             <a:endParaRPr lang="zh-TW" altLang="en-US"/>
@@ -2497,7 +2497,7 @@
           <a:p>
             <a:pPr lvl="0"/>
             <a:r>
-              <a:rPr lang="en-US" altLang="zh-TW" smtClean="0"/>
+              <a:rPr lang="en-US" altLang="zh-TW"/>
               <a:t>Edit Master text styles</a:t>
             </a:r>
           </a:p>
@@ -2520,7 +2520,7 @@
           <a:p>
             <a:fld id="{4708DAAA-A60A-4649-A77A-7F12CC5C96A6}" type="datetimeFigureOut">
               <a:rPr lang="vi-VN" smtClean="0"/>
-              <a:t>13/02/2026</a:t>
+              <a:t>16/02/2026</a:t>
             </a:fld>
             <a:endParaRPr lang="vi-VN"/>
           </a:p>
@@ -2736,7 +2736,7 @@
           <a:p>
             <a:fld id="{4708DAAA-A60A-4649-A77A-7F12CC5C96A6}" type="datetimeFigureOut">
               <a:rPr lang="vi-VN" smtClean="0"/>
-              <a:t>13/02/2026</a:t>
+              <a:t>16/02/2026</a:t>
             </a:fld>
             <a:endParaRPr lang="vi-VN"/>
           </a:p>
@@ -3318,27 +3318,7 @@
                 <a:latin typeface="微軟正黑體" pitchFamily="34" charset="-120"/>
                 <a:ea typeface="微軟正黑體" pitchFamily="34" charset="-120"/>
               </a:rPr>
-              <a:t>更新我心</a:t>
-            </a:r>
-            <a:r>
-              <a:rPr lang="zh-CN" altLang="en-US" sz="6400" b="1" dirty="0" smtClean="0">
-                <a:solidFill>
-                  <a:srgbClr val="000066"/>
-                </a:solidFill>
-                <a:latin typeface="微軟正黑體" pitchFamily="34" charset="-120"/>
-                <a:ea typeface="微軟正黑體" pitchFamily="34" charset="-120"/>
-              </a:rPr>
-              <a:t>意  使</a:t>
-            </a:r>
-            <a:r>
-              <a:rPr lang="zh-CN" altLang="en-US" sz="6400" b="1" dirty="0">
-                <a:solidFill>
-                  <a:srgbClr val="000066"/>
-                </a:solidFill>
-                <a:latin typeface="微軟正黑體" pitchFamily="34" charset="-120"/>
-                <a:ea typeface="微軟正黑體" pitchFamily="34" charset="-120"/>
-              </a:rPr>
-              <a:t>我能像祢</a:t>
+              <a:t>更新我心意  使我能像祢</a:t>
             </a:r>
           </a:p>
         </p:txBody>
@@ -3506,7 +3486,7 @@
               <a:buNone/>
             </a:pPr>
             <a:r>
-              <a:rPr lang="vi-VN" sz="4000" b="1" dirty="0" smtClean="0">
+              <a:rPr lang="vi-VN" sz="4000" b="1" dirty="0">
                 <a:solidFill>
                   <a:srgbClr val="660033"/>
                 </a:solidFill>
@@ -3656,27 +3636,7 @@
                 <a:latin typeface="微軟正黑體" pitchFamily="34" charset="-120"/>
                 <a:ea typeface="微軟正黑體" pitchFamily="34" charset="-120"/>
               </a:rPr>
-              <a:t>更新我心</a:t>
-            </a:r>
-            <a:r>
-              <a:rPr lang="zh-CN" altLang="en-US" sz="6400" b="1" dirty="0" smtClean="0">
-                <a:solidFill>
-                  <a:srgbClr val="000066"/>
-                </a:solidFill>
-                <a:latin typeface="微軟正黑體" pitchFamily="34" charset="-120"/>
-                <a:ea typeface="微軟正黑體" pitchFamily="34" charset="-120"/>
-              </a:rPr>
-              <a:t>意  使</a:t>
-            </a:r>
-            <a:r>
-              <a:rPr lang="zh-CN" altLang="en-US" sz="6400" b="1" dirty="0">
-                <a:solidFill>
-                  <a:srgbClr val="000066"/>
-                </a:solidFill>
-                <a:latin typeface="微軟正黑體" pitchFamily="34" charset="-120"/>
-                <a:ea typeface="微軟正黑體" pitchFamily="34" charset="-120"/>
-              </a:rPr>
-              <a:t>我能像祢</a:t>
+              <a:t>更新我心意  使我能像祢</a:t>
             </a:r>
           </a:p>
         </p:txBody>
@@ -3852,21 +3812,10 @@
                 <a:ea typeface="微軟正黑體" pitchFamily="34" charset="-120"/>
                 <a:cs typeface="Calibri" panose="020F0502020204030204" pitchFamily="34" charset="0"/>
               </a:rPr>
-              <a:t>Cầu xin </a:t>
-            </a:r>
-            <a:r>
-              <a:rPr lang="vi-VN" sz="4000" b="1" dirty="0" smtClean="0">
-                <a:solidFill>
-                  <a:srgbClr val="660033"/>
-                </a:solidFill>
-                <a:latin typeface="+mj-lt"/>
-                <a:ea typeface="微軟正黑體" pitchFamily="34" charset="-120"/>
-                <a:cs typeface="Calibri" panose="020F0502020204030204" pitchFamily="34" charset="0"/>
-              </a:rPr>
-              <a:t>Ch</a:t>
-            </a:r>
-            <a:r>
-              <a:rPr lang="en-US" sz="4000" b="1" dirty="0" smtClean="0">
+              <a:t>Cầu xin Ch</a:t>
+            </a:r>
+            <a:r>
+              <a:rPr lang="en-US" sz="4000" b="1" dirty="0">
                 <a:solidFill>
                   <a:srgbClr val="660033"/>
                 </a:solidFill>
@@ -3877,7 +3826,7 @@
               <a:t>a</a:t>
             </a:r>
             <a:r>
-              <a:rPr lang="vi-VN" sz="4000" b="1" dirty="0" smtClean="0">
+              <a:rPr lang="vi-VN" sz="4000" b="1" dirty="0">
                 <a:solidFill>
                   <a:srgbClr val="660033"/>
                 </a:solidFill>
@@ -3885,18 +3834,7 @@
                 <a:ea typeface="微軟正黑體" pitchFamily="34" charset="-120"/>
                 <a:cs typeface="Calibri" panose="020F0502020204030204" pitchFamily="34" charset="0"/>
               </a:rPr>
-              <a:t> </a:t>
-            </a:r>
-            <a:r>
-              <a:rPr lang="vi-VN" sz="4000" b="1" dirty="0">
-                <a:solidFill>
-                  <a:srgbClr val="660033"/>
-                </a:solidFill>
-                <a:latin typeface="+mj-lt"/>
-                <a:ea typeface="微軟正黑體" pitchFamily="34" charset="-120"/>
-                <a:cs typeface="Calibri" panose="020F0502020204030204" pitchFamily="34" charset="0"/>
-              </a:rPr>
-              <a:t>đổi lòng khiến con nên giống Ngài</a:t>
+              <a:t> đổi lòng khiến con nên giống Ngài</a:t>
             </a:r>
             <a:endParaRPr lang="en-US" sz="4000" b="1" dirty="0">
               <a:solidFill>
@@ -4262,7 +4200,7 @@
               <a:t>( </a:t>
             </a:r>
             <a:r>
-              <a:rPr lang="zh-CN" altLang="en-US" sz="2800" b="1" dirty="0" smtClean="0">
+              <a:rPr lang="zh-CN" altLang="en-US" sz="2800" b="1" dirty="0">
                 <a:solidFill>
                   <a:srgbClr val="000066"/>
                 </a:solidFill>
@@ -4273,7 +4211,7 @@
               <a:t>副歌</a:t>
             </a:r>
             <a:r>
-              <a:rPr lang="en-US" sz="2800" b="1" dirty="0" smtClean="0">
+              <a:rPr lang="en-US" sz="2800" b="1" dirty="0">
                 <a:solidFill>
                   <a:srgbClr val="000066"/>
                 </a:solidFill>
@@ -4281,18 +4219,7 @@
                 <a:latin typeface="Microsoft JhengHei" panose="020B0604030504040204" pitchFamily="34" charset="-120"/>
                 <a:ea typeface="Microsoft JhengHei" panose="020B0604030504040204" pitchFamily="34" charset="-120"/>
               </a:rPr>
-              <a:t> </a:t>
-            </a:r>
-            <a:r>
-              <a:rPr lang="en-US" sz="2800" b="1" dirty="0">
-                <a:solidFill>
-                  <a:srgbClr val="000066"/>
-                </a:solidFill>
-                <a:effectLst/>
-                <a:latin typeface="Microsoft JhengHei" panose="020B0604030504040204" pitchFamily="34" charset="-120"/>
-                <a:ea typeface="Microsoft JhengHei" panose="020B0604030504040204" pitchFamily="34" charset="-120"/>
-              </a:rPr>
-              <a:t>)</a:t>
+              <a:t> )</a:t>
             </a:r>
             <a:endParaRPr lang="vi-VN" sz="2800" b="1" dirty="0">
               <a:solidFill>
@@ -4360,14 +4287,24 @@
               <a:buNone/>
             </a:pPr>
             <a:r>
-              <a:rPr lang="zh-TW" altLang="en-US" sz="6400" b="1" dirty="0">
+              <a:rPr lang="zh-CN" altLang="en-US" sz="6600" b="1" dirty="0">
                 <a:solidFill>
                   <a:srgbClr val="000066"/>
                 </a:solidFill>
                 <a:latin typeface="微軟正黑體" pitchFamily="34" charset="-120"/>
                 <a:ea typeface="微軟正黑體" pitchFamily="34" charset="-120"/>
               </a:rPr>
-              <a:t>模我塑造我  是我的懇求</a:t>
+              <a:t>陶</a:t>
+            </a:r>
+            <a:r>
+              <a:rPr lang="zh-TW" altLang="en-US" sz="6400" b="1" dirty="0">
+                <a:solidFill>
+                  <a:srgbClr val="000066"/>
+                </a:solidFill>
+                <a:latin typeface="微軟正黑體" pitchFamily="34" charset="-120"/>
+                <a:ea typeface="微軟正黑體" pitchFamily="34" charset="-120"/>
+              </a:rPr>
+              <a:t>我塑造我  是我的懇求</a:t>
             </a:r>
           </a:p>
         </p:txBody>
@@ -4543,21 +4480,10 @@
                 <a:ea typeface="微軟正黑體" pitchFamily="34" charset="-120"/>
                 <a:cs typeface="Calibri" panose="020F0502020204030204" pitchFamily="34" charset="0"/>
               </a:rPr>
-              <a:t>Nhờ Ngài khuôn đúc </a:t>
-            </a:r>
-            <a:r>
-              <a:rPr lang="vi-VN" sz="4000" b="1" dirty="0" smtClean="0">
-                <a:solidFill>
-                  <a:srgbClr val="660033"/>
-                </a:solidFill>
-                <a:latin typeface="+mj-lt"/>
-                <a:ea typeface="微軟正黑體" pitchFamily="34" charset="-120"/>
-                <a:cs typeface="Calibri" panose="020F0502020204030204" pitchFamily="34" charset="0"/>
-              </a:rPr>
-              <a:t>con</a:t>
-            </a:r>
-            <a:r>
-              <a:rPr lang="en-US" sz="4000" b="1" dirty="0" smtClean="0">
+              <a:t>Nhờ Ngài khuôn đúc con</a:t>
+            </a:r>
+            <a:r>
+              <a:rPr lang="en-US" sz="4000" b="1" dirty="0">
                 <a:solidFill>
                   <a:srgbClr val="660033"/>
                 </a:solidFill>
@@ -4568,7 +4494,7 @@
               <a:t>,</a:t>
             </a:r>
             <a:r>
-              <a:rPr lang="vi-VN" sz="4000" b="1" dirty="0" smtClean="0">
+              <a:rPr lang="vi-VN" sz="4000" b="1" dirty="0">
                 <a:solidFill>
                   <a:srgbClr val="660033"/>
                 </a:solidFill>
@@ -4576,18 +4502,7 @@
                 <a:ea typeface="微軟正黑體" pitchFamily="34" charset="-120"/>
                 <a:cs typeface="Calibri" panose="020F0502020204030204" pitchFamily="34" charset="0"/>
               </a:rPr>
-              <a:t> </a:t>
-            </a:r>
-            <a:r>
-              <a:rPr lang="vi-VN" sz="4000" b="1" dirty="0">
-                <a:solidFill>
-                  <a:srgbClr val="660033"/>
-                </a:solidFill>
-                <a:latin typeface="+mj-lt"/>
-                <a:ea typeface="微軟正黑體" pitchFamily="34" charset="-120"/>
-                <a:cs typeface="Calibri" panose="020F0502020204030204" pitchFamily="34" charset="0"/>
-              </a:rPr>
-              <a:t>Thánh </a:t>
+              <a:t> Thánh </a:t>
             </a:r>
             <a:r>
               <a:rPr lang="en-US" sz="4000" b="1" dirty="0">
@@ -4601,7 +4516,7 @@
               <a:t>ý</a:t>
             </a:r>
             <a:r>
-              <a:rPr lang="vi-VN" sz="4000" b="1" dirty="0" smtClean="0">
+              <a:rPr lang="vi-VN" sz="4000" b="1" dirty="0">
                 <a:solidFill>
                   <a:srgbClr val="660033"/>
                 </a:solidFill>
@@ -4609,18 +4524,7 @@
                 <a:ea typeface="微軟正黑體" pitchFamily="34" charset="-120"/>
                 <a:cs typeface="Calibri" panose="020F0502020204030204" pitchFamily="34" charset="0"/>
               </a:rPr>
-              <a:t> </a:t>
-            </a:r>
-            <a:r>
-              <a:rPr lang="vi-VN" sz="4000" b="1" dirty="0">
-                <a:solidFill>
-                  <a:srgbClr val="660033"/>
-                </a:solidFill>
-                <a:latin typeface="+mj-lt"/>
-                <a:ea typeface="微軟正黑體" pitchFamily="34" charset="-120"/>
-                <a:cs typeface="Calibri" panose="020F0502020204030204" pitchFamily="34" charset="0"/>
-              </a:rPr>
-              <a:t>Cha được nên</a:t>
+              <a:t> Cha được nên</a:t>
             </a:r>
             <a:endParaRPr lang="en-US" sz="4000" b="1" dirty="0">
               <a:solidFill>
@@ -4668,7 +4572,7 @@
               <a:t>( </a:t>
             </a:r>
             <a:r>
-              <a:rPr lang="zh-CN" altLang="en-US" sz="2800" b="1" dirty="0" smtClean="0">
+              <a:rPr lang="zh-CN" altLang="en-US" sz="2800" b="1" dirty="0">
                 <a:solidFill>
                   <a:srgbClr val="000066"/>
                 </a:solidFill>
@@ -4679,7 +4583,7 @@
               <a:t>副歌</a:t>
             </a:r>
             <a:r>
-              <a:rPr lang="en-US" sz="2800" b="1" dirty="0" smtClean="0">
+              <a:rPr lang="en-US" sz="2800" b="1" dirty="0">
                 <a:solidFill>
                   <a:srgbClr val="000066"/>
                 </a:solidFill>
@@ -4687,18 +4591,7 @@
                 <a:latin typeface="Microsoft JhengHei" panose="020B0604030504040204" pitchFamily="34" charset="-120"/>
                 <a:ea typeface="Microsoft JhengHei" panose="020B0604030504040204" pitchFamily="34" charset="-120"/>
               </a:rPr>
-              <a:t> </a:t>
-            </a:r>
-            <a:r>
-              <a:rPr lang="en-US" sz="2800" b="1" dirty="0">
-                <a:solidFill>
-                  <a:srgbClr val="000066"/>
-                </a:solidFill>
-                <a:effectLst/>
-                <a:latin typeface="Microsoft JhengHei" panose="020B0604030504040204" pitchFamily="34" charset="-120"/>
-                <a:ea typeface="Microsoft JhengHei" panose="020B0604030504040204" pitchFamily="34" charset="-120"/>
-              </a:rPr>
-              <a:t>)</a:t>
+              <a:t> )</a:t>
             </a:r>
             <a:endParaRPr lang="vi-VN" sz="2800" b="1" dirty="0">
               <a:solidFill>
